--- a/assessing_models/results_paleoTS_v0.6.1/plot/intv_steps_res_aicc.pptx
+++ b/assessing_models/results_paleoTS_v0.6.1/plot/intv_steps_res_aicc.pptx
@@ -104,6 +104,11 @@
       </a:defRPr>
     </a:lvl9pPr>
   </p:defaultTextStyle>
+  <p:extLst>
+    <p:ext uri="{EFAFB233-063F-42B5-8137-9DF3F51BA10A}">
+      <p15:sldGuideLst xmlns:p15="http://schemas.microsoft.com/office/powerpoint/2012/main"/>
+    </p:ext>
+  </p:extLst>
 </p:presentation>
 </file>
 
@@ -254,7 +259,7 @@
           <a:p>
             <a:fld id="{B3A51444-D0AD-FC40-8480-375691BF17CC}" type="datetimeFigureOut">
               <a:rPr lang="nb-NO" smtClean="0"/>
-              <a:t>19.11.2025</a:t>
+              <a:t>03.02.2026</a:t>
             </a:fld>
             <a:endParaRPr lang="nb-NO"/>
           </a:p>
@@ -452,7 +457,7 @@
           <a:p>
             <a:fld id="{B3A51444-D0AD-FC40-8480-375691BF17CC}" type="datetimeFigureOut">
               <a:rPr lang="nb-NO" smtClean="0"/>
-              <a:t>19.11.2025</a:t>
+              <a:t>03.02.2026</a:t>
             </a:fld>
             <a:endParaRPr lang="nb-NO"/>
           </a:p>
@@ -660,7 +665,7 @@
           <a:p>
             <a:fld id="{B3A51444-D0AD-FC40-8480-375691BF17CC}" type="datetimeFigureOut">
               <a:rPr lang="nb-NO" smtClean="0"/>
-              <a:t>19.11.2025</a:t>
+              <a:t>03.02.2026</a:t>
             </a:fld>
             <a:endParaRPr lang="nb-NO"/>
           </a:p>
@@ -858,7 +863,7 @@
           <a:p>
             <a:fld id="{B3A51444-D0AD-FC40-8480-375691BF17CC}" type="datetimeFigureOut">
               <a:rPr lang="nb-NO" smtClean="0"/>
-              <a:t>19.11.2025</a:t>
+              <a:t>03.02.2026</a:t>
             </a:fld>
             <a:endParaRPr lang="nb-NO"/>
           </a:p>
@@ -1133,7 +1138,7 @@
           <a:p>
             <a:fld id="{B3A51444-D0AD-FC40-8480-375691BF17CC}" type="datetimeFigureOut">
               <a:rPr lang="nb-NO" smtClean="0"/>
-              <a:t>19.11.2025</a:t>
+              <a:t>03.02.2026</a:t>
             </a:fld>
             <a:endParaRPr lang="nb-NO"/>
           </a:p>
@@ -1398,7 +1403,7 @@
           <a:p>
             <a:fld id="{B3A51444-D0AD-FC40-8480-375691BF17CC}" type="datetimeFigureOut">
               <a:rPr lang="nb-NO" smtClean="0"/>
-              <a:t>19.11.2025</a:t>
+              <a:t>03.02.2026</a:t>
             </a:fld>
             <a:endParaRPr lang="nb-NO"/>
           </a:p>
@@ -1810,7 +1815,7 @@
           <a:p>
             <a:fld id="{B3A51444-D0AD-FC40-8480-375691BF17CC}" type="datetimeFigureOut">
               <a:rPr lang="nb-NO" smtClean="0"/>
-              <a:t>19.11.2025</a:t>
+              <a:t>03.02.2026</a:t>
             </a:fld>
             <a:endParaRPr lang="nb-NO"/>
           </a:p>
@@ -1951,7 +1956,7 @@
           <a:p>
             <a:fld id="{B3A51444-D0AD-FC40-8480-375691BF17CC}" type="datetimeFigureOut">
               <a:rPr lang="nb-NO" smtClean="0"/>
-              <a:t>19.11.2025</a:t>
+              <a:t>03.02.2026</a:t>
             </a:fld>
             <a:endParaRPr lang="nb-NO"/>
           </a:p>
@@ -2064,7 +2069,7 @@
           <a:p>
             <a:fld id="{B3A51444-D0AD-FC40-8480-375691BF17CC}" type="datetimeFigureOut">
               <a:rPr lang="nb-NO" smtClean="0"/>
-              <a:t>19.11.2025</a:t>
+              <a:t>03.02.2026</a:t>
             </a:fld>
             <a:endParaRPr lang="nb-NO"/>
           </a:p>
@@ -2375,7 +2380,7 @@
           <a:p>
             <a:fld id="{B3A51444-D0AD-FC40-8480-375691BF17CC}" type="datetimeFigureOut">
               <a:rPr lang="nb-NO" smtClean="0"/>
-              <a:t>19.11.2025</a:t>
+              <a:t>03.02.2026</a:t>
             </a:fld>
             <a:endParaRPr lang="nb-NO"/>
           </a:p>
@@ -2663,7 +2668,7 @@
           <a:p>
             <a:fld id="{B3A51444-D0AD-FC40-8480-375691BF17CC}" type="datetimeFigureOut">
               <a:rPr lang="nb-NO" smtClean="0"/>
-              <a:t>19.11.2025</a:t>
+              <a:t>03.02.2026</a:t>
             </a:fld>
             <a:endParaRPr lang="nb-NO"/>
           </a:p>
@@ -2904,7 +2909,7 @@
           <a:p>
             <a:fld id="{B3A51444-D0AD-FC40-8480-375691BF17CC}" type="datetimeFigureOut">
               <a:rPr lang="nb-NO" smtClean="0"/>
-              <a:t>19.11.2025</a:t>
+              <a:t>03.02.2026</a:t>
             </a:fld>
             <a:endParaRPr lang="nb-NO"/>
           </a:p>
@@ -3323,32 +3328,30 @@
       </p:grpSpPr>
       <p:grpSp>
         <p:nvGrpSpPr>
-          <p:cNvPr id="7" name="Gruppe 6">
-            <a:extLst>
-              <a:ext uri="{FF2B5EF4-FFF2-40B4-BE49-F238E27FC236}">
-                <a16:creationId xmlns:a16="http://schemas.microsoft.com/office/drawing/2014/main" id="{D8C7BF00-2440-37C6-EE63-F7C9D3E9C5C3}"/>
-              </a:ext>
-            </a:extLst>
-          </p:cNvPr>
-          <p:cNvGrpSpPr>
-            <a:grpSpLocks noChangeAspect="1"/>
-          </p:cNvGrpSpPr>
+          <p:cNvPr id="9" name="Gruppe 8">
+            <a:extLst>
+              <a:ext uri="{FF2B5EF4-FFF2-40B4-BE49-F238E27FC236}">
+                <a16:creationId xmlns:a16="http://schemas.microsoft.com/office/drawing/2014/main" id="{ADD0DB79-56A2-0C62-B818-D3E9D75DE714}"/>
+              </a:ext>
+            </a:extLst>
+          </p:cNvPr>
+          <p:cNvGrpSpPr/>
           <p:nvPr/>
         </p:nvGrpSpPr>
         <p:grpSpPr>
           <a:xfrm>
-            <a:off x="98629" y="459310"/>
-            <a:ext cx="11994741" cy="5939380"/>
-            <a:chOff x="442209" y="1528600"/>
-            <a:chExt cx="8414483" cy="4166560"/>
+            <a:off x="0" y="763904"/>
+            <a:ext cx="12192000" cy="5355541"/>
+            <a:chOff x="0" y="304800"/>
+            <a:chExt cx="12700178" cy="5330190"/>
           </a:xfrm>
         </p:grpSpPr>
         <p:pic>
           <p:nvPicPr>
-            <p:cNvPr id="4" name="Bilde 3">
+            <p:cNvPr id="2" name="Bilde 1">
               <a:extLst>
                 <a:ext uri="{FF2B5EF4-FFF2-40B4-BE49-F238E27FC236}">
-                  <a16:creationId xmlns:a16="http://schemas.microsoft.com/office/drawing/2014/main" id="{D5B81027-6323-280B-3C2C-52C4440F16FE}"/>
+                  <a16:creationId xmlns:a16="http://schemas.microsoft.com/office/drawing/2014/main" id="{DAD6AD87-85DC-CB94-0B7E-D4B10C756727}"/>
                 </a:ext>
               </a:extLst>
             </p:cNvPr>
@@ -3359,15 +3362,15 @@
           </p:nvPicPr>
           <p:blipFill>
             <a:blip r:embed="rId2"/>
-            <a:srcRect l="40613" r="40924"/>
+            <a:srcRect r="15859"/>
             <a:stretch>
               <a:fillRect/>
             </a:stretch>
           </p:blipFill>
           <p:spPr>
             <a:xfrm>
-              <a:off x="3622500" y="1528600"/>
-              <a:ext cx="2098060" cy="4166560"/>
+              <a:off x="0" y="304800"/>
+              <a:ext cx="4484914" cy="5330190"/>
             </a:xfrm>
             <a:prstGeom prst="rect">
               <a:avLst/>
@@ -3376,10 +3379,10 @@
         </p:pic>
         <p:pic>
           <p:nvPicPr>
-            <p:cNvPr id="5" name="Bilde 4">
+            <p:cNvPr id="3" name="Bilde 2">
               <a:extLst>
                 <a:ext uri="{FF2B5EF4-FFF2-40B4-BE49-F238E27FC236}">
-                  <a16:creationId xmlns:a16="http://schemas.microsoft.com/office/drawing/2014/main" id="{0AFA3574-9C73-5621-C627-E1851EC421A9}"/>
+                  <a16:creationId xmlns:a16="http://schemas.microsoft.com/office/drawing/2014/main" id="{8E934E61-6276-B03E-4875-847FE47C26CB}"/>
                 </a:ext>
               </a:extLst>
             </p:cNvPr>
@@ -3389,16 +3392,16 @@
             <p:nvPr/>
           </p:nvPicPr>
           <p:blipFill>
-            <a:blip r:embed="rId2"/>
-            <a:srcRect l="73965" r="965"/>
+            <a:blip r:embed="rId3"/>
+            <a:srcRect l="15797" r="16021"/>
             <a:stretch>
               <a:fillRect/>
             </a:stretch>
           </p:blipFill>
           <p:spPr>
             <a:xfrm>
-              <a:off x="6007750" y="1528600"/>
-              <a:ext cx="2848942" cy="4166560"/>
+              <a:off x="4571560" y="304800"/>
+              <a:ext cx="3634257" cy="5330190"/>
             </a:xfrm>
             <a:prstGeom prst="rect">
               <a:avLst/>
@@ -3407,10 +3410,10 @@
         </p:pic>
         <p:pic>
           <p:nvPicPr>
-            <p:cNvPr id="6" name="Bilde 5">
+            <p:cNvPr id="8" name="Bilde 7">
               <a:extLst>
                 <a:ext uri="{FF2B5EF4-FFF2-40B4-BE49-F238E27FC236}">
-                  <a16:creationId xmlns:a16="http://schemas.microsoft.com/office/drawing/2014/main" id="{56B91DC8-32E1-5F5C-5283-CE26B7FE3B34}"/>
+                  <a16:creationId xmlns:a16="http://schemas.microsoft.com/office/drawing/2014/main" id="{769EC9C7-0738-5EC7-7F22-06A65A4C7F09}"/>
                 </a:ext>
               </a:extLst>
             </p:cNvPr>
@@ -3420,16 +3423,16 @@
             <p:nvPr/>
           </p:nvPicPr>
           <p:blipFill>
-            <a:blip r:embed="rId2"/>
-            <a:srcRect l="244" r="74296"/>
+            <a:blip r:embed="rId4"/>
+            <a:srcRect l="15683" r="1623"/>
             <a:stretch>
               <a:fillRect/>
             </a:stretch>
           </p:blipFill>
           <p:spPr>
             <a:xfrm>
-              <a:off x="442209" y="1528600"/>
-              <a:ext cx="2893101" cy="4166560"/>
+              <a:off x="8292463" y="304800"/>
+              <a:ext cx="4407715" cy="5330190"/>
             </a:xfrm>
             <a:prstGeom prst="rect">
               <a:avLst/>
